--- a/Introduccion a la Ingenieria/Clases/Clase 3 - Fundamentos basicos de la Ingenieria de Sistemas/Presentacion.pptx
+++ b/Introduccion a la Ingenieria/Clases/Clase 3 - Fundamentos basicos de la Ingenieria de Sistemas/Presentacion.pptx
@@ -5725,7 +5725,7 @@
               </a:spcAft>
             </a:pPr>
             <a:r>
-              <a:rPr sz="1600" b="0" i="0">
+              <a:rPr sz="2000" b="0" i="0">
                 <a:solidFill>
                   <a:srgbClr val="333333"/>
                 </a:solidFill>
@@ -5734,7 +5734,7 @@
               <a:t>–   </a:t>
             </a:r>
             <a:r>
-              <a:rPr sz="1600" b="1" i="0">
+              <a:rPr sz="2000" b="1" i="0">
                 <a:solidFill>
                   <a:srgbClr val="333333"/>
                 </a:solidFill>
@@ -5743,7 +5743,7 @@
               <a:t>Trabajo dirigido:</a:t>
             </a:r>
             <a:r>
-              <a:rPr sz="1600" b="0" i="0">
+              <a:rPr sz="2000" b="0" i="0">
                 <a:solidFill>
                   <a:srgbClr val="333333"/>
                 </a:solidFill>
@@ -5759,7 +5759,7 @@
               </a:spcAft>
             </a:pPr>
             <a:r>
-              <a:rPr sz="1600" b="0" i="0">
+              <a:rPr sz="2000" b="0" i="0">
                 <a:solidFill>
                   <a:srgbClr val="333333"/>
                 </a:solidFill>
@@ -5768,7 +5768,7 @@
               <a:t>–   </a:t>
             </a:r>
             <a:r>
-              <a:rPr sz="1600" b="1" i="0">
+              <a:rPr sz="2000" b="1" i="0">
                 <a:solidFill>
                   <a:srgbClr val="333333"/>
                 </a:solidFill>
@@ -5777,7 +5777,7 @@
               <a:t>Trabajo independiente:</a:t>
             </a:r>
             <a:r>
-              <a:rPr sz="1600" b="0" i="0">
+              <a:rPr sz="2000" b="0" i="0">
                 <a:solidFill>
                   <a:srgbClr val="333333"/>
                 </a:solidFill>
@@ -5793,7 +5793,7 @@
               </a:spcAft>
             </a:pPr>
             <a:r>
-              <a:rPr sz="1600" b="0" i="0">
+              <a:rPr sz="2000" b="0" i="0">
                 <a:solidFill>
                   <a:srgbClr val="333333"/>
                 </a:solidFill>
@@ -5802,7 +5802,7 @@
               <a:t>–   </a:t>
             </a:r>
             <a:r>
-              <a:rPr sz="1600" b="1" i="0">
+              <a:rPr sz="2000" b="1" i="0">
                 <a:solidFill>
                   <a:srgbClr val="333333"/>
                 </a:solidFill>
@@ -5811,7 +5811,7 @@
               <a:t>Sesión 4 · Principios éticos en la Ingeniería</a:t>
             </a:r>
             <a:r>
-              <a:rPr sz="1600" b="0" i="0">
+              <a:rPr sz="2000" b="0" i="0">
                 <a:solidFill>
                   <a:srgbClr val="333333"/>
                 </a:solidFill>
@@ -5827,7 +5827,7 @@
               </a:spcAft>
             </a:pPr>
             <a:r>
-              <a:rPr sz="1600" b="0" i="0">
+              <a:rPr sz="2000" b="0" i="0">
                 <a:solidFill>
                   <a:srgbClr val="333333"/>
                 </a:solidFill>
@@ -5836,7 +5836,7 @@
               <a:t>–   </a:t>
             </a:r>
             <a:r>
-              <a:rPr sz="1600" b="1" i="0">
+              <a:rPr sz="2000" b="1" i="0">
                 <a:solidFill>
                   <a:srgbClr val="333333"/>
                 </a:solidFill>
@@ -5845,7 +5845,7 @@
               <a:t>Aviso:</a:t>
             </a:r>
             <a:r>
-              <a:rPr sz="1600" b="0" i="0">
+              <a:rPr sz="2000" b="0" i="0">
                 <a:solidFill>
                   <a:srgbClr val="333333"/>
                 </a:solidFill>
@@ -5854,7 +5854,7 @@
               <a:t> Traigan identificado el </a:t>
             </a:r>
             <a:r>
-              <a:rPr sz="1600" b="1" i="0">
+              <a:rPr sz="2000" b="1" i="0">
                 <a:solidFill>
                   <a:srgbClr val="333333"/>
                 </a:solidFill>
@@ -5863,7 +5863,7 @@
               <a:t>actor no-usuario</a:t>
             </a:r>
             <a:r>
-              <a:rPr sz="1600" b="0" i="0">
+              <a:rPr sz="2000" b="0" i="0">
                 <a:solidFill>
                   <a:srgbClr val="333333"/>
                 </a:solidFill>
@@ -5879,7 +5879,7 @@
               </a:spcAft>
             </a:pPr>
             <a:r>
-              <a:rPr sz="1600" b="0" i="0">
+              <a:rPr sz="2000" b="0" i="0">
                 <a:solidFill>
                   <a:srgbClr val="333333"/>
                 </a:solidFill>
@@ -5888,7 +5888,7 @@
               <a:t>–   </a:t>
             </a:r>
             <a:r>
-              <a:rPr sz="1600" b="1" i="0">
+              <a:rPr sz="2000" b="1" i="0">
                 <a:solidFill>
                   <a:srgbClr val="333333"/>
                 </a:solidFill>
@@ -5897,7 +5897,7 @@
               <a:t>Antes de salir:</a:t>
             </a:r>
             <a:r>
-              <a:rPr sz="1600" b="0" i="0">
+              <a:rPr sz="2000" b="0" i="0">
                 <a:solidFill>
                   <a:srgbClr val="333333"/>
                 </a:solidFill>
@@ -6471,7 +6471,7 @@
         <p:spPr>
           <a:xfrm>
             <a:off x="502920" y="2798064"/>
-            <a:ext cx="2164019" cy="2560320"/>
+            <a:ext cx="2164019" cy="3099816"/>
           </a:xfrm>
           <a:prstGeom prst="rect">
             <a:avLst/>
@@ -6586,7 +6586,7 @@
         <p:spPr>
           <a:xfrm>
             <a:off x="2758379" y="2798064"/>
-            <a:ext cx="2164019" cy="2560320"/>
+            <a:ext cx="2164019" cy="3099816"/>
           </a:xfrm>
           <a:prstGeom prst="rect">
             <a:avLst/>
@@ -6701,7 +6701,7 @@
         <p:spPr>
           <a:xfrm>
             <a:off x="5013838" y="2798064"/>
-            <a:ext cx="2164019" cy="2560320"/>
+            <a:ext cx="2164019" cy="3099816"/>
           </a:xfrm>
           <a:prstGeom prst="rect">
             <a:avLst/>
@@ -6816,7 +6816,7 @@
         <p:spPr>
           <a:xfrm>
             <a:off x="7269297" y="2798064"/>
-            <a:ext cx="2164019" cy="2560320"/>
+            <a:ext cx="2164019" cy="3099816"/>
           </a:xfrm>
           <a:prstGeom prst="rect">
             <a:avLst/>
@@ -6931,7 +6931,7 @@
         <p:spPr>
           <a:xfrm>
             <a:off x="9524756" y="2798064"/>
-            <a:ext cx="2164019" cy="2560320"/>
+            <a:ext cx="2164019" cy="3099816"/>
           </a:xfrm>
           <a:prstGeom prst="rect">
             <a:avLst/>
@@ -6965,8 +6965,8 @@
         </p:nvSpPr>
         <p:spPr>
           <a:xfrm>
-            <a:off x="457200" y="5943600"/>
-            <a:ext cx="11277295" cy="365760"/>
+            <a:off x="457200" y="5806440"/>
+            <a:ext cx="11277295" cy="640080"/>
           </a:xfrm>
           <a:prstGeom prst="rect">
             <a:avLst/>
@@ -7219,7 +7219,7 @@
               </a:spcAft>
             </a:pPr>
             <a:r>
-              <a:rPr sz="1600" b="0" i="0">
+              <a:rPr sz="2000" b="0" i="0">
                 <a:solidFill>
                   <a:srgbClr val="333333"/>
                 </a:solidFill>
@@ -7228,7 +7228,7 @@
               <a:t>–   Definir </a:t>
             </a:r>
             <a:r>
-              <a:rPr sz="1600" b="1" i="0">
+              <a:rPr sz="2000" b="1" i="0">
                 <a:solidFill>
                   <a:srgbClr val="333333"/>
                 </a:solidFill>
@@ -7237,7 +7237,7 @@
               <a:t>sistema</a:t>
             </a:r>
             <a:r>
-              <a:rPr sz="1600" b="0" i="0">
+              <a:rPr sz="2000" b="0" i="0">
                 <a:solidFill>
                   <a:srgbClr val="333333"/>
                 </a:solidFill>
@@ -7253,7 +7253,7 @@
               </a:spcAft>
             </a:pPr>
             <a:r>
-              <a:rPr sz="1600" b="0" i="0">
+              <a:rPr sz="2000" b="0" i="0">
                 <a:solidFill>
                   <a:srgbClr val="333333"/>
                 </a:solidFill>
@@ -7262,7 +7262,7 @@
               <a:t>–   Distinguir el </a:t>
             </a:r>
             <a:r>
-              <a:rPr sz="1600" b="1" i="0">
+              <a:rPr sz="2000" b="1" i="0">
                 <a:solidFill>
                   <a:srgbClr val="333333"/>
                 </a:solidFill>
@@ -7271,7 +7271,7 @@
               <a:t>sistema</a:t>
             </a:r>
             <a:r>
-              <a:rPr sz="1600" b="0" i="0">
+              <a:rPr sz="2000" b="0" i="0">
                 <a:solidFill>
                   <a:srgbClr val="333333"/>
                 </a:solidFill>
@@ -7280,7 +7280,7 @@
               <a:t> del </a:t>
             </a:r>
             <a:r>
-              <a:rPr sz="1600" b="1" i="0">
+              <a:rPr sz="2000" b="1" i="0">
                 <a:solidFill>
                   <a:srgbClr val="333333"/>
                 </a:solidFill>
@@ -7289,7 +7289,7 @@
               <a:t>software</a:t>
             </a:r>
             <a:r>
-              <a:rPr sz="1600" b="0" i="0">
+              <a:rPr sz="2000" b="0" i="0">
                 <a:solidFill>
                   <a:srgbClr val="333333"/>
                 </a:solidFill>
@@ -7305,7 +7305,7 @@
               </a:spcAft>
             </a:pPr>
             <a:r>
-              <a:rPr sz="1600" b="0" i="0">
+              <a:rPr sz="2000" b="0" i="0">
                 <a:solidFill>
                   <a:srgbClr val="333333"/>
                 </a:solidFill>
@@ -7314,7 +7314,7 @@
               <a:t>–   Identificar los </a:t>
             </a:r>
             <a:r>
-              <a:rPr sz="1600" b="1" i="0">
+              <a:rPr sz="2000" b="1" i="0">
                 <a:solidFill>
                   <a:srgbClr val="333333"/>
                 </a:solidFill>
@@ -7323,7 +7323,7 @@
               <a:t>actores</a:t>
             </a:r>
             <a:r>
-              <a:rPr sz="1600" b="0" i="0">
+              <a:rPr sz="2000" b="0" i="0">
                 <a:solidFill>
                   <a:srgbClr val="333333"/>
                 </a:solidFill>
@@ -7339,7 +7339,7 @@
               </a:spcAft>
             </a:pPr>
             <a:r>
-              <a:rPr sz="1600" b="0" i="0">
+              <a:rPr sz="2000" b="0" i="0">
                 <a:solidFill>
                   <a:srgbClr val="333333"/>
                 </a:solidFill>
@@ -7348,7 +7348,7 @@
               <a:t>–   Usar un asistente de IA para descomponer un sistema y </a:t>
             </a:r>
             <a:r>
-              <a:rPr sz="1600" b="1" i="0">
+              <a:rPr sz="2000" b="1" i="0">
                 <a:solidFill>
                   <a:srgbClr val="333333"/>
                 </a:solidFill>
@@ -7357,7 +7357,7 @@
               <a:t>corregir a mano lo que inventó</a:t>
             </a:r>
             <a:r>
-              <a:rPr sz="1600" b="0" i="0">
+              <a:rPr sz="2000" b="0" i="0">
                 <a:solidFill>
                   <a:srgbClr val="333333"/>
                 </a:solidFill>
@@ -9071,7 +9071,7 @@
               </a:spcAft>
             </a:pPr>
             <a:r>
-              <a:rPr sz="1300" b="0" i="0">
+              <a:rPr sz="1500" b="0" i="0">
                 <a:solidFill>
                   <a:srgbClr val="333333"/>
                 </a:solidFill>
@@ -9087,7 +9087,7 @@
               </a:spcAft>
             </a:pPr>
             <a:r>
-              <a:rPr sz="1300" b="0" i="0">
+              <a:rPr sz="1500" b="0" i="0">
                 <a:solidFill>
                   <a:srgbClr val="333333"/>
                 </a:solidFill>
@@ -9103,7 +9103,7 @@
               </a:spcAft>
             </a:pPr>
             <a:r>
-              <a:rPr sz="1300" b="0" i="0">
+              <a:rPr sz="1500" b="0" i="0">
                 <a:solidFill>
                   <a:srgbClr val="333333"/>
                 </a:solidFill>
@@ -9119,7 +9119,7 @@
               </a:spcAft>
             </a:pPr>
             <a:r>
-              <a:rPr sz="1300" b="0" i="0">
+              <a:rPr sz="1500" b="0" i="0">
                 <a:solidFill>
                   <a:srgbClr val="333333"/>
                 </a:solidFill>
@@ -9135,7 +9135,7 @@
               </a:spcAft>
             </a:pPr>
             <a:r>
-              <a:rPr sz="1300" b="0" i="0">
+              <a:rPr sz="1500" b="0" i="0">
                 <a:solidFill>
                   <a:srgbClr val="333333"/>
                 </a:solidFill>
@@ -9295,7 +9295,7 @@
               </a:spcAft>
             </a:pPr>
             <a:r>
-              <a:rPr sz="1300" b="0" i="0">
+              <a:rPr sz="1500" b="0" i="0">
                 <a:solidFill>
                   <a:srgbClr val="333333"/>
                 </a:solidFill>
@@ -9311,7 +9311,7 @@
               </a:spcAft>
             </a:pPr>
             <a:r>
-              <a:rPr sz="1300" b="0" i="0">
+              <a:rPr sz="1500" b="0" i="0">
                 <a:solidFill>
                   <a:srgbClr val="333333"/>
                 </a:solidFill>
@@ -9327,7 +9327,7 @@
               </a:spcAft>
             </a:pPr>
             <a:r>
-              <a:rPr sz="1300" b="0" i="0">
+              <a:rPr sz="1500" b="0" i="0">
                 <a:solidFill>
                   <a:srgbClr val="333333"/>
                 </a:solidFill>
@@ -9336,7 +9336,7 @@
               <a:t>–   Termina cuando </a:t>
             </a:r>
             <a:r>
-              <a:rPr sz="1300" b="1" i="0">
+              <a:rPr sz="1500" b="1" i="0">
                 <a:solidFill>
                   <a:srgbClr val="333333"/>
                 </a:solidFill>
@@ -9345,7 +9345,7 @@
               <a:t>la fila se acortó</a:t>
             </a:r>
             <a:r>
-              <a:rPr sz="1300" b="0" i="0">
+              <a:rPr sz="1500" b="0" i="0">
                 <a:solidFill>
                   <a:srgbClr val="333333"/>
                 </a:solidFill>
@@ -9361,7 +9361,7 @@
               </a:spcAft>
             </a:pPr>
             <a:r>
-              <a:rPr sz="1300" b="0" i="0">
+              <a:rPr sz="1500" b="0" i="0">
                 <a:solidFill>
                   <a:srgbClr val="333333"/>
                 </a:solidFill>
@@ -9370,7 +9370,7 @@
               <a:t>–   El éxito es que </a:t>
             </a:r>
             <a:r>
-              <a:rPr sz="1300" b="1" i="0">
+              <a:rPr sz="1500" b="1" i="0">
                 <a:solidFill>
                   <a:srgbClr val="333333"/>
                 </a:solidFill>
@@ -9379,7 +9379,7 @@
               <a:t>el problema del entorno se redujo</a:t>
             </a:r>
             <a:r>
-              <a:rPr sz="1300" b="0" i="0">
+              <a:rPr sz="1500" b="0" i="0">
                 <a:solidFill>
                   <a:srgbClr val="333333"/>
                 </a:solidFill>
@@ -9395,7 +9395,7 @@
               </a:spcAft>
             </a:pPr>
             <a:r>
-              <a:rPr sz="1300" b="0" i="0">
+              <a:rPr sz="1500" b="0" i="0">
                 <a:solidFill>
                   <a:srgbClr val="333333"/>
                 </a:solidFill>

--- a/Introduccion a la Ingenieria/Clases/Clase 3 - Fundamentos basicos de la Ingenieria de Sistemas/Presentacion.pptx
+++ b/Introduccion a la Ingenieria/Clases/Clase 3 - Fundamentos basicos de la Ingenieria de Sistemas/Presentacion.pptx
@@ -5692,7 +5692,7 @@
                 </a:solidFill>
                 <a:latin typeface="Calibri"/>
               </a:rPr>
-              <a:t>Para la sesión 4</a:t>
+              <a:t>Para la Clase 4</a:t>
             </a:r>
           </a:p>
         </p:txBody>
@@ -5808,7 +5808,7 @@
                 </a:solidFill>
                 <a:latin typeface="Calibri"/>
               </a:rPr>
-              <a:t>Sesión 4 · Principios éticos en la Ingeniería</a:t>
+              <a:t>Clase 4 · Principios éticos en la Ingeniería</a:t>
             </a:r>
             <a:r>
               <a:rPr sz="2000" b="0" i="0">
